--- a/decks/hist-medicine/hist-medicine_ch6_black-death-factors.pptx
+++ b/decks/hist-medicine/hist-medicine_ch6_black-death-factors.pptx
@@ -129,30 +129,30 @@
   <p:extLst>
     <p:ext uri="{521415D9-36F7-43E2-AB2F-B90AF26B5E84}">
       <p14:sectionLst xmlns:p14="http://schemas.microsoft.com/office/powerpoint/2010/main">
-        <p14:section name="Opening" id="{4c6b5d5c-8a0a-d26e-6316-60ad6d01c37d}">
+        <p14:section name="Opening" id="{d33a8c50-2143-139c-1ea7-df677d5c2dae}">
           <p14:sldIdLst>
             <p14:sldId id="256"/>
           </p14:sldIdLst>
         </p14:section>
-        <p14:section name="Gate" id="{a88d8868-2b47-6c07-b3bf-a9e78da55a12}">
+        <p14:section name="Gate" id="{aa61f741-7be3-6989-7415-981ed877ac72}">
           <p14:sldIdLst>
             <p14:sldId id="257"/>
             <p14:sldId id="258"/>
           </p14:sldIdLst>
         </p14:section>
-        <p14:section name="Pre-teach" id="{bf2697b2-b399-375c-3876-a017df8d3288}">
+        <p14:section name="Pre-teach" id="{92eadba1-19e3-15fe-fc37-0e1caae7ca4f}">
           <p14:sldIdLst>
             <p14:sldId id="259"/>
             <p14:sldId id="260"/>
           </p14:sldIdLst>
         </p14:section>
-        <p14:section name="Read-along" id="{2e97e58f-4c6f-bf36-fb32-f014c4290edb}">
+        <p14:section name="Read-along" id="{d289ffe0-f231-2c0c-80e6-bb33629feb51}">
           <p14:sldIdLst>
             <p14:sldId id="261"/>
             <p14:sldId id="262"/>
           </p14:sldIdLst>
         </p14:section>
-        <p14:section name="Teach" id="{5944c487-cb68-14c5-809b-f57b1e7630f0}">
+        <p14:section name="Teach" id="{e20809a9-aaa9-a4fa-0ed5-c000fb83e2e4}">
           <p14:sldIdLst>
             <p14:sldId id="263"/>
             <p14:sldId id="264"/>
@@ -162,7 +162,7 @@
             <p14:sldId id="268"/>
           </p14:sldIdLst>
         </p14:section>
-        <p14:section name="Routes" id="{1760ee51-6046-019b-ae9f-84294b862c2c}">
+        <p14:section name="Routes" id="{fca57895-c2ba-191e-3299-b37d1876b153}">
           <p14:sldIdLst>
             <p14:sldId id="269"/>
             <p14:sldId id="270"/>
@@ -172,12 +172,12 @@
             <p14:sldId id="274"/>
           </p14:sldIdLst>
         </p14:section>
-        <p14:section name="Close" id="{ae0b8a02-61c7-0257-1335-ae121bd62556}">
+        <p14:section name="Close" id="{52d9f67a-6a31-1797-2117-78b5f1aeac1f}">
           <p14:sldIdLst>
             <p14:sldId id="275"/>
           </p14:sldIdLst>
         </p14:section>
-        <p14:section name="Answers" id="{af372cd6-f841-4dca-34a4-7b47132e4866}">
+        <p14:section name="Answers" id="{f82f4d93-a999-2086-5484-7e1100fef2a4}">
           <p14:sldIdLst>
             <p14:sldId id="276"/>
             <p14:sldId id="277"/>
@@ -1613,7 +1613,7 @@
               <a:rPr lang="en-US" dirty="0"/>
               <a:t>Do now — retrieval. Silent, no notes, no help: recall comes before any support. Give about four minutes.
 1. In which year did the Black Death reach England?  →  1348
-2. What did most people at the time believe had caused the Black Death?  →  A   God had sent it as a punishment for people's sins
+2. What did most people at the time believe had caused the Black Death?  →  B   God had sent it as a punishment for people's sins
 3. Most historians today think the Black Death was ___ plague, spread by fleas living on black rats.  →  bubonic
 Circulate: who gets 3/3 (Stretch route), 2/3 (Core), 0–1 (Support)? Use this to route pupils later in the lesson.</a:t>
             </a:r>
@@ -2071,7 +2071,7 @@
               <a:rPr lang="en-US" dirty="0"/>
               <a:t>Answers — pupils mark their own in a different colour, then hands up for 3/3, 2/3, 1/3.
 1. 1348. The disease reached Europe in 1347 and England in 1348. The English outbreak is dated 1348–49.
-2. A   God had sent it as a punishment for people's sins. The most widespread belief was that the plague was God's punishment. Fleas and rats are what historians think today, not what people believed then.
+2. B   God had sent it as a punishment for people's sins. The most widespread belief was that the plague was God's punishment. Fleas and rats are what historians think today, not what people believed then.
 3. bubonic. Bubonic plague is named after the buboes, the swellings it causes. It passes to people through the bite of an infected flea.
 Say the route each score points to: 3/3 Stretch, 2/3 Core, 0–1 Support. Pupils may choose to move up.</a:t>
             </a:r>
@@ -11992,7 +11992,7 @@
                 <a:ea typeface="Calibri" pitchFamily="34" charset="-122"/>
                 <a:cs typeface="Calibri" pitchFamily="34" charset="-120"/>
               </a:rPr>
-              <a:t>God had sent it as a punishment for people's sins</a:t>
+              <a:t>A new germ had arrived from Asia</a:t>
             </a:r>
             <a:endParaRPr lang="en-US" sz="2200" dirty="0"/>
           </a:p>
@@ -12029,7 +12029,7 @@
                 <a:ea typeface="Calibri" pitchFamily="34" charset="-122"/>
                 <a:cs typeface="Calibri" pitchFamily="34" charset="-120"/>
               </a:rPr>
-              <a:t>Fleas living on black rats had spread it</a:t>
+              <a:t>God had sent it as a punishment for people's sins</a:t>
             </a:r>
             <a:endParaRPr lang="en-US" sz="2200" dirty="0"/>
           </a:p>
@@ -12066,7 +12066,7 @@
                 <a:ea typeface="Calibri" pitchFamily="34" charset="-122"/>
                 <a:cs typeface="Calibri" pitchFamily="34" charset="-120"/>
               </a:rPr>
-              <a:t>A new germ had arrived from Asia</a:t>
+              <a:t>Dirty drinking water had spread it</a:t>
             </a:r>
             <a:endParaRPr lang="en-US" sz="2200" dirty="0"/>
           </a:p>
@@ -12103,7 +12103,7 @@
                 <a:ea typeface="Calibri" pitchFamily="34" charset="-122"/>
                 <a:cs typeface="Calibri" pitchFamily="34" charset="-120"/>
               </a:rPr>
-              <a:t>Dirty drinking water had spread it</a:t>
+              <a:t>Fleas living on black rats had spread it</a:t>
             </a:r>
             <a:endParaRPr lang="en-US" sz="2200" dirty="0"/>
           </a:p>
@@ -15030,7 +15030,7 @@
                 <a:ea typeface="Calibri" pitchFamily="34" charset="-122"/>
                 <a:cs typeface="Calibri" pitchFamily="34" charset="-120"/>
               </a:rPr>
-              <a:t>A   God had sent it as a punishment for people's sins</a:t>
+              <a:t>B   God had sent it as a punishment for people's sins</a:t>
             </a:r>
             <a:endParaRPr lang="en-US" sz="2200" dirty="0"/>
           </a:p>

--- a/decks/hist-medicine/hist-medicine_ch6_black-death-factors.pptx
+++ b/decks/hist-medicine/hist-medicine_ch6_black-death-factors.pptx
@@ -129,30 +129,30 @@
   <p:extLst>
     <p:ext uri="{521415D9-36F7-43E2-AB2F-B90AF26B5E84}">
       <p14:sectionLst xmlns:p14="http://schemas.microsoft.com/office/powerpoint/2010/main">
-        <p14:section name="Opening" id="{d33a8c50-2143-139c-1ea7-df677d5c2dae}">
+        <p14:section name="Opening" id="{08019160-fc5d-5d12-f243-5dd4b837b5c3}">
           <p14:sldIdLst>
             <p14:sldId id="256"/>
           </p14:sldIdLst>
         </p14:section>
-        <p14:section name="Gate" id="{aa61f741-7be3-6989-7415-981ed877ac72}">
+        <p14:section name="Gate" id="{dd250319-c2eb-e4ed-6e44-30bf1fb81743}">
           <p14:sldIdLst>
             <p14:sldId id="257"/>
             <p14:sldId id="258"/>
           </p14:sldIdLst>
         </p14:section>
-        <p14:section name="Pre-teach" id="{92eadba1-19e3-15fe-fc37-0e1caae7ca4f}">
+        <p14:section name="Pre-teach" id="{66a4f8f4-174c-cae0-aa5c-39782a4132a7}">
           <p14:sldIdLst>
             <p14:sldId id="259"/>
             <p14:sldId id="260"/>
           </p14:sldIdLst>
         </p14:section>
-        <p14:section name="Read-along" id="{d289ffe0-f231-2c0c-80e6-bb33629feb51}">
+        <p14:section name="Read-along" id="{d494a8cd-4b5f-2326-a7dc-fc68f3d10197}">
           <p14:sldIdLst>
             <p14:sldId id="261"/>
             <p14:sldId id="262"/>
           </p14:sldIdLst>
         </p14:section>
-        <p14:section name="Teach" id="{e20809a9-aaa9-a4fa-0ed5-c000fb83e2e4}">
+        <p14:section name="Teach" id="{baa1f223-3cb3-94aa-b7cd-df5689314416}">
           <p14:sldIdLst>
             <p14:sldId id="263"/>
             <p14:sldId id="264"/>
@@ -162,7 +162,7 @@
             <p14:sldId id="268"/>
           </p14:sldIdLst>
         </p14:section>
-        <p14:section name="Routes" id="{fca57895-c2ba-191e-3299-b37d1876b153}">
+        <p14:section name="Routes" id="{654a766c-f108-617b-7367-45a8000e6a3f}">
           <p14:sldIdLst>
             <p14:sldId id="269"/>
             <p14:sldId id="270"/>
@@ -172,12 +172,12 @@
             <p14:sldId id="274"/>
           </p14:sldIdLst>
         </p14:section>
-        <p14:section name="Close" id="{52d9f67a-6a31-1797-2117-78b5f1aeac1f}">
+        <p14:section name="Close" id="{c5c653db-c5f1-0967-8b58-ab10f20f4fa9}">
           <p14:sldIdLst>
             <p14:sldId id="275"/>
           </p14:sldIdLst>
         </p14:section>
-        <p14:section name="Answers" id="{f82f4d93-a999-2086-5484-7e1100fef2a4}">
+        <p14:section name="Answers" id="{d53afee2-6744-524f-81af-d79f6ad5cf25}">
           <p14:sldIdLst>
             <p14:sldId id="276"/>
             <p14:sldId id="277"/>
